--- a/Projeto-Slides/Projeto-React-Chess.pptx
+++ b/Projeto-Slides/Projeto-React-Chess.pptx
@@ -15,10 +15,12 @@
     <p:sldId id="264" r:id="rId9"/>
     <p:sldId id="265" r:id="rId10"/>
     <p:sldId id="266" r:id="rId11"/>
-    <p:sldId id="267" r:id="rId12"/>
-    <p:sldId id="268" r:id="rId13"/>
-    <p:sldId id="269" r:id="rId14"/>
-    <p:sldId id="270" r:id="rId15"/>
+    <p:sldId id="271" r:id="rId12"/>
+    <p:sldId id="272" r:id="rId13"/>
+    <p:sldId id="267" r:id="rId14"/>
+    <p:sldId id="268" r:id="rId15"/>
+    <p:sldId id="269" r:id="rId16"/>
+    <p:sldId id="270" r:id="rId17"/>
   </p:sldIdLst>
   <p:sldSz cx="12192000" cy="6858000"/>
   <p:notesSz cx="6858000" cy="9144000"/>
@@ -14058,7 +14060,7 @@
         <p:spPr>
           <a:xfrm>
             <a:off x="4305300" y="1532671"/>
-            <a:ext cx="3200400" cy="5201503"/>
+            <a:ext cx="6130470" cy="5201503"/>
           </a:xfrm>
           <a:prstGeom prst="rect">
             <a:avLst/>
@@ -14092,7 +14094,7 @@
           </a:fontRef>
         </p:style>
         <p:txBody>
-          <a:bodyPr rtlCol="0" anchor="ctr"/>
+          <a:bodyPr numCol="2" rtlCol="0" anchor="ctr"/>
           <a:lstStyle/>
           <a:p>
             <a:pPr lvl="0"/>
@@ -14305,7 +14307,7 @@
                   <a:schemeClr val="bg1"/>
                 </a:solidFill>
               </a:rPr>
-              <a:t>this.Players</a:t>
+              <a:t>this</a:t>
             </a:r>
             <a:r>
               <a:rPr lang="pt-BR" dirty="0">
@@ -14313,7 +14315,7 @@
                   <a:schemeClr val="bg1"/>
                 </a:solidFill>
               </a:rPr>
-              <a:t> = [{Player, color},</a:t>
+              <a:t>.#Players = [{Player, color},</a:t>
             </a:r>
           </a:p>
           <a:p>
@@ -14328,14 +14330,14 @@
             </a:r>
           </a:p>
           <a:p>
-            <a:pPr lvl="0"/>
+            <a:pPr lvl="1"/>
             <a:r>
               <a:rPr lang="pt-BR" dirty="0" err="1">
                 <a:solidFill>
                   <a:schemeClr val="bg1"/>
                 </a:solidFill>
               </a:rPr>
-              <a:t>Methods</a:t>
+              <a:t>This.capturedPieces</a:t>
             </a:r>
             <a:endParaRPr lang="pt-BR" dirty="0">
               <a:solidFill>
@@ -14351,6 +14353,54 @@
                   <a:schemeClr val="bg1"/>
                 </a:solidFill>
               </a:rPr>
+              <a:t>This.calculator</a:t>
+            </a:r>
+            <a:endParaRPr lang="pt-BR" dirty="0">
+              <a:solidFill>
+                <a:schemeClr val="bg1"/>
+              </a:solidFill>
+            </a:endParaRPr>
+          </a:p>
+          <a:p>
+            <a:pPr lvl="1"/>
+            <a:r>
+              <a:rPr lang="pt-BR" dirty="0" err="1">
+                <a:solidFill>
+                  <a:schemeClr val="bg1"/>
+                </a:solidFill>
+              </a:rPr>
+              <a:t>This.turn</a:t>
+            </a:r>
+            <a:endParaRPr lang="pt-BR" dirty="0">
+              <a:solidFill>
+                <a:schemeClr val="bg1"/>
+              </a:solidFill>
+            </a:endParaRPr>
+          </a:p>
+          <a:p>
+            <a:pPr lvl="0"/>
+            <a:r>
+              <a:rPr lang="pt-BR" dirty="0" err="1">
+                <a:solidFill>
+                  <a:schemeClr val="bg1"/>
+                </a:solidFill>
+              </a:rPr>
+              <a:t>Methods</a:t>
+            </a:r>
+            <a:endParaRPr lang="pt-BR" dirty="0">
+              <a:solidFill>
+                <a:schemeClr val="bg1"/>
+              </a:solidFill>
+            </a:endParaRPr>
+          </a:p>
+          <a:p>
+            <a:pPr lvl="1"/>
+            <a:r>
+              <a:rPr lang="pt-BR" dirty="0" err="1">
+                <a:solidFill>
+                  <a:schemeClr val="bg1"/>
+                </a:solidFill>
+              </a:rPr>
               <a:t>getPiece</a:t>
             </a:r>
             <a:r>
@@ -14555,6 +14605,97 @@
               </a:rPr>
               <a:t>})</a:t>
             </a:r>
+          </a:p>
+          <a:p>
+            <a:pPr lvl="1"/>
+            <a:r>
+              <a:rPr lang="pt-BR" dirty="0" err="1">
+                <a:solidFill>
+                  <a:schemeClr val="bg1"/>
+                </a:solidFill>
+              </a:rPr>
+              <a:t>getPiece</a:t>
+            </a:r>
+            <a:r>
+              <a:rPr lang="pt-BR" dirty="0">
+                <a:solidFill>
+                  <a:schemeClr val="bg1"/>
+                </a:solidFill>
+              </a:rPr>
+              <a:t>(</a:t>
+            </a:r>
+            <a:r>
+              <a:rPr lang="pt-BR" dirty="0" err="1">
+                <a:solidFill>
+                  <a:schemeClr val="bg1"/>
+                </a:solidFill>
+              </a:rPr>
+              <a:t>row</a:t>
+            </a:r>
+            <a:r>
+              <a:rPr lang="pt-BR" dirty="0">
+                <a:solidFill>
+                  <a:schemeClr val="bg1"/>
+                </a:solidFill>
+              </a:rPr>
+              <a:t>, </a:t>
+            </a:r>
+            <a:r>
+              <a:rPr lang="pt-BR" dirty="0" err="1">
+                <a:solidFill>
+                  <a:schemeClr val="bg1"/>
+                </a:solidFill>
+              </a:rPr>
+              <a:t>col</a:t>
+            </a:r>
+            <a:r>
+              <a:rPr lang="pt-BR" dirty="0">
+                <a:solidFill>
+                  <a:schemeClr val="bg1"/>
+                </a:solidFill>
+              </a:rPr>
+              <a:t>)</a:t>
+            </a:r>
+          </a:p>
+          <a:p>
+            <a:pPr lvl="1"/>
+            <a:r>
+              <a:rPr lang="pt-BR" dirty="0" err="1">
+                <a:solidFill>
+                  <a:schemeClr val="bg1"/>
+                </a:solidFill>
+              </a:rPr>
+              <a:t>setBoardFromFEN</a:t>
+            </a:r>
+            <a:endParaRPr lang="pt-BR" dirty="0">
+              <a:solidFill>
+                <a:schemeClr val="bg1"/>
+              </a:solidFill>
+            </a:endParaRPr>
+          </a:p>
+          <a:p>
+            <a:pPr lvl="1"/>
+            <a:r>
+              <a:rPr lang="pt-BR" dirty="0" err="1">
+                <a:solidFill>
+                  <a:schemeClr val="bg1"/>
+                </a:solidFill>
+              </a:rPr>
+              <a:t>setGameFromPGN</a:t>
+            </a:r>
+            <a:endParaRPr lang="pt-BR" dirty="0">
+              <a:solidFill>
+                <a:schemeClr val="bg1"/>
+              </a:solidFill>
+            </a:endParaRPr>
+          </a:p>
+          <a:p>
+            <a:pPr lvl="1"/>
+            <a:endParaRPr lang="pt-BR" dirty="0">
+              <a:solidFill>
+                <a:schemeClr val="bg1"/>
+              </a:solidFill>
+            </a:endParaRPr>
           </a:p>
         </p:txBody>
       </p:sp>
@@ -15046,10 +15187,179 @@
       </p:grpSp>
       <p:sp>
         <p:nvSpPr>
-          <p:cNvPr id="21" name="Retângulo 20">
+          <p:cNvPr id="3" name="CaixaDeTexto 2">
             <a:extLst>
               <a:ext uri="{FF2B5EF4-FFF2-40B4-BE49-F238E27FC236}">
-                <a16:creationId xmlns:a16="http://schemas.microsoft.com/office/drawing/2014/main" id="{407241F1-B595-A3F7-C844-8817AA2047F6}"/>
+                <a16:creationId xmlns:a16="http://schemas.microsoft.com/office/drawing/2014/main" id="{32EEA75B-1F7B-1843-99B3-1ABB941D1A43}"/>
+              </a:ext>
+            </a:extLst>
+          </p:cNvPr>
+          <p:cNvSpPr txBox="1"/>
+          <p:nvPr/>
+        </p:nvSpPr>
+        <p:spPr>
+          <a:xfrm>
+            <a:off x="7370534" y="3845211"/>
+            <a:ext cx="2797377" cy="1169551"/>
+          </a:xfrm>
+          <a:prstGeom prst="rect">
+            <a:avLst/>
+          </a:prstGeom>
+          <a:noFill/>
+        </p:spPr>
+        <p:txBody>
+          <a:bodyPr wrap="square" rtlCol="0">
+            <a:spAutoFit/>
+          </a:bodyPr>
+          <a:lstStyle/>
+          <a:p>
+            <a:r>
+              <a:rPr lang="pt-BR" sz="1400" dirty="0" err="1">
+                <a:solidFill>
+                  <a:schemeClr val="bg1"/>
+                </a:solidFill>
+              </a:rPr>
+              <a:t>virtualBoard</a:t>
+            </a:r>
+            <a:r>
+              <a:rPr lang="pt-BR" sz="1400" dirty="0">
+                <a:solidFill>
+                  <a:schemeClr val="bg1"/>
+                </a:solidFill>
+              </a:rPr>
+              <a:t> &gt; (melhor ser privado,  pois não quero que método como </a:t>
+            </a:r>
+            <a:r>
+              <a:rPr lang="pt-BR" sz="1400" dirty="0" err="1">
+                <a:solidFill>
+                  <a:schemeClr val="bg1"/>
+                </a:solidFill>
+              </a:rPr>
+              <a:t>removePiece</a:t>
+            </a:r>
+            <a:r>
+              <a:rPr lang="pt-BR" sz="1400" dirty="0">
+                <a:solidFill>
+                  <a:schemeClr val="bg1"/>
+                </a:solidFill>
+              </a:rPr>
+              <a:t> sejam acessados de fora)</a:t>
+            </a:r>
+          </a:p>
+          <a:p>
+            <a:endParaRPr lang="pt-BR" sz="1400" dirty="0"/>
+          </a:p>
+        </p:txBody>
+      </p:sp>
+    </p:spTree>
+    <p:extLst>
+      <p:ext uri="{BB962C8B-B14F-4D97-AF65-F5344CB8AC3E}">
+        <p14:creationId xmlns:p14="http://schemas.microsoft.com/office/powerpoint/2010/main" val="1961216710"/>
+      </p:ext>
+    </p:extLst>
+  </p:cSld>
+  <p:clrMapOvr>
+    <a:masterClrMapping/>
+  </p:clrMapOvr>
+</p:sld>
+</file>
+
+<file path=ppt/slides/slide11.xml><?xml version="1.0" encoding="utf-8"?>
+<p:sld xmlns:a="http://schemas.openxmlformats.org/drawingml/2006/main" xmlns:r="http://schemas.openxmlformats.org/officeDocument/2006/relationships" xmlns:p="http://schemas.openxmlformats.org/presentationml/2006/main">
+  <p:cSld>
+    <p:spTree>
+      <p:nvGrpSpPr>
+        <p:cNvPr id="1" name="">
+          <a:extLst>
+            <a:ext uri="{FF2B5EF4-FFF2-40B4-BE49-F238E27FC236}">
+              <a16:creationId xmlns:a16="http://schemas.microsoft.com/office/drawing/2014/main" id="{AC29C616-BF27-621D-1D83-3336076BEBDA}"/>
+            </a:ext>
+          </a:extLst>
+        </p:cNvPr>
+        <p:cNvGrpSpPr/>
+        <p:nvPr/>
+      </p:nvGrpSpPr>
+      <p:grpSpPr>
+        <a:xfrm>
+          <a:off x="0" y="0"/>
+          <a:ext cx="0" cy="0"/>
+          <a:chOff x="0" y="0"/>
+          <a:chExt cx="0" cy="0"/>
+        </a:xfrm>
+      </p:grpSpPr>
+      <p:sp>
+        <p:nvSpPr>
+          <p:cNvPr id="2" name="Título 1">
+            <a:extLst>
+              <a:ext uri="{FF2B5EF4-FFF2-40B4-BE49-F238E27FC236}">
+                <a16:creationId xmlns:a16="http://schemas.microsoft.com/office/drawing/2014/main" id="{41DB232A-95F3-78A0-2139-12687B0D0527}"/>
+              </a:ext>
+            </a:extLst>
+          </p:cNvPr>
+          <p:cNvSpPr>
+            <a:spLocks noGrp="1"/>
+          </p:cNvSpPr>
+          <p:nvPr>
+            <p:ph type="ctrTitle"/>
+          </p:nvPr>
+        </p:nvSpPr>
+        <p:spPr>
+          <a:xfrm>
+            <a:off x="0" y="0"/>
+            <a:ext cx="12194286" cy="883920"/>
+          </a:xfrm>
+          <a:solidFill>
+            <a:schemeClr val="bg1">
+              <a:lumMod val="85000"/>
+              <a:lumOff val="15000"/>
+            </a:schemeClr>
+          </a:solidFill>
+        </p:spPr>
+        <p:txBody>
+          <a:bodyPr>
+            <a:normAutofit fontScale="90000"/>
+          </a:bodyPr>
+          <a:lstStyle/>
+          <a:p>
+            <a:pPr algn="l"/>
+            <a:r>
+              <a:rPr lang="pt-BR" dirty="0" err="1">
+                <a:solidFill>
+                  <a:schemeClr val="tx1"/>
+                </a:solidFill>
+              </a:rPr>
+              <a:t>Property</a:t>
+            </a:r>
+            <a:r>
+              <a:rPr lang="pt-BR" dirty="0">
+                <a:solidFill>
+                  <a:schemeClr val="tx1"/>
+                </a:solidFill>
+              </a:rPr>
+              <a:t> </a:t>
+            </a:r>
+            <a:r>
+              <a:rPr lang="pt-BR" dirty="0" err="1">
+                <a:solidFill>
+                  <a:schemeClr val="tx1"/>
+                </a:solidFill>
+              </a:rPr>
+              <a:t>result</a:t>
+            </a:r>
+            <a:endParaRPr lang="pt-BR" dirty="0">
+              <a:solidFill>
+                <a:schemeClr val="tx1"/>
+              </a:solidFill>
+            </a:endParaRPr>
+          </a:p>
+        </p:txBody>
+      </p:sp>
+      <p:sp>
+        <p:nvSpPr>
+          <p:cNvPr id="13" name="Retângulo 12">
+            <a:extLst>
+              <a:ext uri="{FF2B5EF4-FFF2-40B4-BE49-F238E27FC236}">
+                <a16:creationId xmlns:a16="http://schemas.microsoft.com/office/drawing/2014/main" id="{2813FBA8-7C2C-CAFD-5A2D-96B6C88AE119}"/>
               </a:ext>
             </a:extLst>
           </p:cNvPr>
@@ -15058,8 +15368,8 @@
         </p:nvSpPr>
         <p:spPr>
           <a:xfrm>
-            <a:off x="7505699" y="1560625"/>
-            <a:ext cx="2930071" cy="5173549"/>
+            <a:off x="505809" y="1154299"/>
+            <a:ext cx="9615654" cy="5201503"/>
           </a:xfrm>
           <a:prstGeom prst="rect">
             <a:avLst/>
@@ -15093,18 +15403,21 @@
           </a:fontRef>
         </p:style>
         <p:txBody>
-          <a:bodyPr rtlCol="0" anchor="ctr"/>
+          <a:bodyPr numCol="2" rtlCol="0" anchor="ctr"/>
           <a:lstStyle/>
           <a:p>
             <a:pPr lvl="0"/>
             <a:r>
-              <a:rPr lang="pt-BR" dirty="0" err="1">
+              <a:rPr lang="pt-BR" dirty="0">
                 <a:solidFill>
                   <a:schemeClr val="bg1"/>
                 </a:solidFill>
               </a:rPr>
-              <a:t>Methods</a:t>
-            </a:r>
+              <a:t> POSSIBLE RESULTS</a:t>
+            </a:r>
+          </a:p>
+          <a:p>
+            <a:pPr lvl="0"/>
             <a:endParaRPr lang="pt-BR" dirty="0">
               <a:solidFill>
                 <a:schemeClr val="bg1"/>
@@ -15112,14 +15425,22 @@
             </a:endParaRPr>
           </a:p>
           <a:p>
-            <a:pPr lvl="1"/>
+            <a:pPr lvl="0"/>
+            <a:r>
+              <a:rPr lang="pt-BR" dirty="0">
+                <a:solidFill>
+                  <a:schemeClr val="bg1"/>
+                </a:solidFill>
+              </a:rPr>
+              <a:t>{</a:t>
+            </a:r>
             <a:r>
               <a:rPr lang="pt-BR" dirty="0" err="1">
                 <a:solidFill>
                   <a:schemeClr val="bg1"/>
                 </a:solidFill>
               </a:rPr>
-              <a:t>getPiece</a:t>
+              <a:t>type</a:t>
             </a:r>
             <a:r>
               <a:rPr lang="pt-BR" dirty="0">
@@ -15127,7 +15448,7 @@
                   <a:schemeClr val="bg1"/>
                 </a:solidFill>
               </a:rPr>
-              <a:t>(</a:t>
+              <a:t>: ‘</a:t>
             </a:r>
             <a:r>
               <a:rPr lang="pt-BR" dirty="0" err="1">
@@ -15135,7 +15456,82 @@
                   <a:schemeClr val="bg1"/>
                 </a:solidFill>
               </a:rPr>
-              <a:t>row</a:t>
+              <a:t>draw</a:t>
+            </a:r>
+            <a:r>
+              <a:rPr lang="pt-BR" dirty="0">
+                <a:solidFill>
+                  <a:schemeClr val="bg1"/>
+                </a:solidFill>
+              </a:rPr>
+              <a:t>’, </a:t>
+            </a:r>
+            <a:r>
+              <a:rPr lang="pt-BR" dirty="0" err="1">
+                <a:solidFill>
+                  <a:schemeClr val="bg1"/>
+                </a:solidFill>
+              </a:rPr>
+              <a:t>reason</a:t>
+            </a:r>
+            <a:r>
+              <a:rPr lang="pt-BR" dirty="0">
+                <a:solidFill>
+                  <a:schemeClr val="bg1"/>
+                </a:solidFill>
+              </a:rPr>
+              <a:t>: ‘</a:t>
+            </a:r>
+            <a:r>
+              <a:rPr lang="pt-BR" dirty="0" err="1">
+                <a:solidFill>
+                  <a:schemeClr val="bg1"/>
+                </a:solidFill>
+              </a:rPr>
+              <a:t>stalemate</a:t>
+            </a:r>
+            <a:r>
+              <a:rPr lang="pt-BR" dirty="0">
+                <a:solidFill>
+                  <a:schemeClr val="bg1"/>
+                </a:solidFill>
+              </a:rPr>
+              <a:t>’} </a:t>
+            </a:r>
+          </a:p>
+          <a:p>
+            <a:pPr lvl="0"/>
+            <a:r>
+              <a:rPr lang="pt-BR" dirty="0">
+                <a:solidFill>
+                  <a:schemeClr val="bg1"/>
+                </a:solidFill>
+              </a:rPr>
+              <a:t>{</a:t>
+            </a:r>
+            <a:r>
+              <a:rPr lang="pt-BR" dirty="0" err="1">
+                <a:solidFill>
+                  <a:schemeClr val="bg1"/>
+                </a:solidFill>
+              </a:rPr>
+              <a:t>type</a:t>
+            </a:r>
+            <a:r>
+              <a:rPr lang="pt-BR" dirty="0">
+                <a:solidFill>
+                  <a:schemeClr val="bg1"/>
+                </a:solidFill>
+              </a:rPr>
+              <a:t>: </a:t>
+            </a:r>
+            <a:r>
+              <a:rPr lang="pt-BR" dirty="0" err="1">
+                <a:solidFill>
+                  <a:schemeClr val="bg1"/>
+                </a:solidFill>
+              </a:rPr>
+              <a:t>draw</a:t>
             </a:r>
             <a:r>
               <a:rPr lang="pt-BR" dirty="0">
@@ -15151,7 +15547,7 @@
                   <a:schemeClr val="bg1"/>
                 </a:solidFill>
               </a:rPr>
-              <a:t>col</a:t>
+              <a:t>reason</a:t>
             </a:r>
             <a:r>
               <a:rPr lang="pt-BR" dirty="0">
@@ -15159,113 +15555,773 @@
                   <a:schemeClr val="bg1"/>
                 </a:solidFill>
               </a:rPr>
-              <a:t>)</a:t>
-            </a:r>
-          </a:p>
-          <a:p>
-            <a:pPr lvl="1"/>
+              <a:t>: </a:t>
+            </a:r>
             <a:r>
               <a:rPr lang="pt-BR" dirty="0" err="1">
                 <a:solidFill>
                   <a:schemeClr val="bg1"/>
                 </a:solidFill>
               </a:rPr>
-              <a:t>setBoardFromFEN</a:t>
-            </a:r>
+              <a:t>accordance</a:t>
+            </a:r>
+            <a:r>
+              <a:rPr lang="pt-BR" dirty="0">
+                <a:solidFill>
+                  <a:schemeClr val="bg1"/>
+                </a:solidFill>
+              </a:rPr>
+              <a:t>} </a:t>
+            </a:r>
+          </a:p>
+          <a:p>
+            <a:pPr lvl="0"/>
+            <a:r>
+              <a:rPr lang="pt-BR" dirty="0">
+                <a:solidFill>
+                  <a:schemeClr val="bg1"/>
+                </a:solidFill>
+              </a:rPr>
+              <a:t>{</a:t>
+            </a:r>
+            <a:r>
+              <a:rPr lang="pt-BR" dirty="0" err="1">
+                <a:solidFill>
+                  <a:schemeClr val="bg1"/>
+                </a:solidFill>
+              </a:rPr>
+              <a:t>type</a:t>
+            </a:r>
+            <a:r>
+              <a:rPr lang="pt-BR" dirty="0">
+                <a:solidFill>
+                  <a:schemeClr val="bg1"/>
+                </a:solidFill>
+              </a:rPr>
+              <a:t>: </a:t>
+            </a:r>
+            <a:r>
+              <a:rPr lang="pt-BR" dirty="0" err="1">
+                <a:solidFill>
+                  <a:schemeClr val="bg1"/>
+                </a:solidFill>
+              </a:rPr>
+              <a:t>draw</a:t>
+            </a:r>
+            <a:r>
+              <a:rPr lang="pt-BR" dirty="0">
+                <a:solidFill>
+                  <a:schemeClr val="bg1"/>
+                </a:solidFill>
+              </a:rPr>
+              <a:t>, </a:t>
+            </a:r>
+            <a:r>
+              <a:rPr lang="pt-BR" dirty="0" err="1">
+                <a:solidFill>
+                  <a:schemeClr val="bg1"/>
+                </a:solidFill>
+              </a:rPr>
+              <a:t>reason</a:t>
+            </a:r>
+            <a:r>
+              <a:rPr lang="pt-BR" dirty="0">
+                <a:solidFill>
+                  <a:schemeClr val="bg1"/>
+                </a:solidFill>
+              </a:rPr>
+              <a:t>: </a:t>
+            </a:r>
+            <a:r>
+              <a:rPr lang="pt-BR" dirty="0" err="1">
+                <a:solidFill>
+                  <a:schemeClr val="bg1"/>
+                </a:solidFill>
+              </a:rPr>
+              <a:t>insufficMatrl</a:t>
+            </a:r>
+            <a:r>
+              <a:rPr lang="pt-BR" dirty="0">
+                <a:solidFill>
+                  <a:schemeClr val="bg1"/>
+                </a:solidFill>
+              </a:rPr>
+              <a:t>}</a:t>
+            </a:r>
+          </a:p>
+          <a:p>
+            <a:pPr lvl="0"/>
+            <a:r>
+              <a:rPr lang="pt-BR" dirty="0">
+                <a:solidFill>
+                  <a:schemeClr val="bg1"/>
+                </a:solidFill>
+              </a:rPr>
+              <a:t>{</a:t>
+            </a:r>
+            <a:r>
+              <a:rPr lang="pt-BR" dirty="0" err="1">
+                <a:solidFill>
+                  <a:schemeClr val="bg1"/>
+                </a:solidFill>
+              </a:rPr>
+              <a:t>type</a:t>
+            </a:r>
+            <a:r>
+              <a:rPr lang="pt-BR" dirty="0">
+                <a:solidFill>
+                  <a:schemeClr val="bg1"/>
+                </a:solidFill>
+              </a:rPr>
+              <a:t>: </a:t>
+            </a:r>
+            <a:r>
+              <a:rPr lang="pt-BR" dirty="0" err="1">
+                <a:solidFill>
+                  <a:schemeClr val="bg1"/>
+                </a:solidFill>
+              </a:rPr>
+              <a:t>draw</a:t>
+            </a:r>
+            <a:r>
+              <a:rPr lang="pt-BR" dirty="0">
+                <a:solidFill>
+                  <a:schemeClr val="bg1"/>
+                </a:solidFill>
+              </a:rPr>
+              <a:t>, </a:t>
+            </a:r>
+            <a:r>
+              <a:rPr lang="pt-BR" dirty="0" err="1">
+                <a:solidFill>
+                  <a:schemeClr val="bg1"/>
+                </a:solidFill>
+              </a:rPr>
+              <a:t>reason</a:t>
+            </a:r>
+            <a:r>
+              <a:rPr lang="pt-BR" dirty="0">
+                <a:solidFill>
+                  <a:schemeClr val="bg1"/>
+                </a:solidFill>
+              </a:rPr>
+              <a:t>: </a:t>
+            </a:r>
+            <a:r>
+              <a:rPr lang="pt-BR" dirty="0" err="1">
+                <a:solidFill>
+                  <a:schemeClr val="bg1"/>
+                </a:solidFill>
+              </a:rPr>
+              <a:t>timeoutOnInsufficMatrl</a:t>
+            </a:r>
+            <a:r>
+              <a:rPr lang="pt-BR" dirty="0">
+                <a:solidFill>
+                  <a:schemeClr val="bg1"/>
+                </a:solidFill>
+              </a:rPr>
+              <a:t>} </a:t>
+            </a:r>
+          </a:p>
+          <a:p>
+            <a:pPr lvl="0"/>
+            <a:r>
+              <a:rPr lang="pt-BR" dirty="0">
+                <a:solidFill>
+                  <a:schemeClr val="bg1"/>
+                </a:solidFill>
+              </a:rPr>
+              <a:t>{</a:t>
+            </a:r>
+            <a:r>
+              <a:rPr lang="pt-BR" dirty="0" err="1">
+                <a:solidFill>
+                  <a:schemeClr val="bg1"/>
+                </a:solidFill>
+              </a:rPr>
+              <a:t>type</a:t>
+            </a:r>
+            <a:r>
+              <a:rPr lang="pt-BR" dirty="0">
+                <a:solidFill>
+                  <a:schemeClr val="bg1"/>
+                </a:solidFill>
+              </a:rPr>
+              <a:t>: </a:t>
+            </a:r>
+            <a:r>
+              <a:rPr lang="pt-BR" dirty="0" err="1">
+                <a:solidFill>
+                  <a:schemeClr val="bg1"/>
+                </a:solidFill>
+              </a:rPr>
+              <a:t>draw</a:t>
+            </a:r>
+            <a:r>
+              <a:rPr lang="pt-BR" dirty="0">
+                <a:solidFill>
+                  <a:schemeClr val="bg1"/>
+                </a:solidFill>
+              </a:rPr>
+              <a:t>, </a:t>
+            </a:r>
+            <a:r>
+              <a:rPr lang="pt-BR" dirty="0" err="1">
+                <a:solidFill>
+                  <a:schemeClr val="bg1"/>
+                </a:solidFill>
+              </a:rPr>
+              <a:t>reason</a:t>
+            </a:r>
+            <a:r>
+              <a:rPr lang="pt-BR" dirty="0">
+                <a:solidFill>
+                  <a:schemeClr val="bg1"/>
+                </a:solidFill>
+              </a:rPr>
+              <a:t>: </a:t>
+            </a:r>
+            <a:r>
+              <a:rPr lang="pt-BR" dirty="0" err="1">
+                <a:solidFill>
+                  <a:schemeClr val="bg1"/>
+                </a:solidFill>
+              </a:rPr>
+              <a:t>fiftyMvs</a:t>
+            </a:r>
+            <a:r>
+              <a:rPr lang="pt-BR" dirty="0">
+                <a:solidFill>
+                  <a:schemeClr val="bg1"/>
+                </a:solidFill>
+              </a:rPr>
+              <a:t>} </a:t>
+            </a:r>
+          </a:p>
+          <a:p>
+            <a:pPr lvl="0"/>
+            <a:r>
+              <a:rPr lang="pt-BR" dirty="0">
+                <a:solidFill>
+                  <a:schemeClr val="bg1"/>
+                </a:solidFill>
+              </a:rPr>
+              <a:t>{</a:t>
+            </a:r>
+            <a:r>
+              <a:rPr lang="pt-BR" dirty="0" err="1">
+                <a:solidFill>
+                  <a:schemeClr val="bg1"/>
+                </a:solidFill>
+              </a:rPr>
+              <a:t>type</a:t>
+            </a:r>
+            <a:r>
+              <a:rPr lang="pt-BR" dirty="0">
+                <a:solidFill>
+                  <a:schemeClr val="bg1"/>
+                </a:solidFill>
+              </a:rPr>
+              <a:t>: </a:t>
+            </a:r>
+            <a:r>
+              <a:rPr lang="pt-BR" dirty="0" err="1">
+                <a:solidFill>
+                  <a:schemeClr val="bg1"/>
+                </a:solidFill>
+              </a:rPr>
+              <a:t>draw</a:t>
+            </a:r>
+            <a:r>
+              <a:rPr lang="pt-BR" dirty="0">
+                <a:solidFill>
+                  <a:schemeClr val="bg1"/>
+                </a:solidFill>
+              </a:rPr>
+              <a:t>, </a:t>
+            </a:r>
+            <a:r>
+              <a:rPr lang="pt-BR" dirty="0" err="1">
+                <a:solidFill>
+                  <a:schemeClr val="bg1"/>
+                </a:solidFill>
+              </a:rPr>
+              <a:t>reason</a:t>
+            </a:r>
+            <a:r>
+              <a:rPr lang="pt-BR" dirty="0">
+                <a:solidFill>
+                  <a:schemeClr val="bg1"/>
+                </a:solidFill>
+              </a:rPr>
+              <a:t>: </a:t>
+            </a:r>
+            <a:r>
+              <a:rPr lang="pt-BR" dirty="0" err="1">
+                <a:solidFill>
+                  <a:schemeClr val="bg1"/>
+                </a:solidFill>
+              </a:rPr>
+              <a:t>threeMvRepetition</a:t>
+            </a:r>
+            <a:r>
+              <a:rPr lang="pt-BR" dirty="0">
+                <a:solidFill>
+                  <a:schemeClr val="bg1"/>
+                </a:solidFill>
+              </a:rPr>
+              <a:t>} </a:t>
+            </a:r>
+          </a:p>
+          <a:p>
+            <a:pPr lvl="0"/>
+            <a:r>
+              <a:rPr lang="pt-BR" dirty="0">
+                <a:solidFill>
+                  <a:schemeClr val="bg1"/>
+                </a:solidFill>
+              </a:rPr>
+              <a:t>{</a:t>
+            </a:r>
+            <a:r>
+              <a:rPr lang="pt-BR" dirty="0" err="1">
+                <a:solidFill>
+                  <a:schemeClr val="bg1"/>
+                </a:solidFill>
+              </a:rPr>
+              <a:t>type</a:t>
+            </a:r>
+            <a:r>
+              <a:rPr lang="pt-BR" dirty="0">
+                <a:solidFill>
+                  <a:schemeClr val="bg1"/>
+                </a:solidFill>
+              </a:rPr>
+              <a:t>: </a:t>
+            </a:r>
+            <a:r>
+              <a:rPr lang="pt-BR" dirty="0" err="1">
+                <a:solidFill>
+                  <a:schemeClr val="bg1"/>
+                </a:solidFill>
+              </a:rPr>
+              <a:t>whiteVictory</a:t>
+            </a:r>
+            <a:r>
+              <a:rPr lang="pt-BR" dirty="0">
+                <a:solidFill>
+                  <a:schemeClr val="bg1"/>
+                </a:solidFill>
+              </a:rPr>
+              <a:t>, </a:t>
+            </a:r>
+            <a:r>
+              <a:rPr lang="pt-BR" dirty="0" err="1">
+                <a:solidFill>
+                  <a:schemeClr val="bg1"/>
+                </a:solidFill>
+              </a:rPr>
+              <a:t>reason</a:t>
+            </a:r>
+            <a:r>
+              <a:rPr lang="pt-BR" dirty="0">
+                <a:solidFill>
+                  <a:schemeClr val="bg1"/>
+                </a:solidFill>
+              </a:rPr>
+              <a:t>: </a:t>
+            </a:r>
+            <a:r>
+              <a:rPr lang="pt-BR" dirty="0" err="1">
+                <a:solidFill>
+                  <a:schemeClr val="bg1"/>
+                </a:solidFill>
+              </a:rPr>
+              <a:t>resignation</a:t>
+            </a:r>
+            <a:r>
+              <a:rPr lang="pt-BR" dirty="0">
+                <a:solidFill>
+                  <a:schemeClr val="bg1"/>
+                </a:solidFill>
+              </a:rPr>
+              <a:t>} </a:t>
+            </a:r>
+          </a:p>
+          <a:p>
+            <a:pPr lvl="0"/>
+            <a:r>
+              <a:rPr lang="pt-BR" dirty="0">
+                <a:solidFill>
+                  <a:schemeClr val="bg1"/>
+                </a:solidFill>
+              </a:rPr>
+              <a:t>{</a:t>
+            </a:r>
+            <a:r>
+              <a:rPr lang="pt-BR" dirty="0" err="1">
+                <a:solidFill>
+                  <a:schemeClr val="bg1"/>
+                </a:solidFill>
+              </a:rPr>
+              <a:t>type</a:t>
+            </a:r>
+            <a:r>
+              <a:rPr lang="pt-BR" dirty="0">
+                <a:solidFill>
+                  <a:schemeClr val="bg1"/>
+                </a:solidFill>
+              </a:rPr>
+              <a:t>: </a:t>
+            </a:r>
+            <a:r>
+              <a:rPr lang="pt-BR" dirty="0" err="1">
+                <a:solidFill>
+                  <a:schemeClr val="bg1"/>
+                </a:solidFill>
+              </a:rPr>
+              <a:t>blackVictory</a:t>
+            </a:r>
+            <a:r>
+              <a:rPr lang="pt-BR" dirty="0">
+                <a:solidFill>
+                  <a:schemeClr val="bg1"/>
+                </a:solidFill>
+              </a:rPr>
+              <a:t>, </a:t>
+            </a:r>
+            <a:r>
+              <a:rPr lang="pt-BR" dirty="0" err="1">
+                <a:solidFill>
+                  <a:schemeClr val="bg1"/>
+                </a:solidFill>
+              </a:rPr>
+              <a:t>reason</a:t>
+            </a:r>
+            <a:r>
+              <a:rPr lang="pt-BR" dirty="0">
+                <a:solidFill>
+                  <a:schemeClr val="bg1"/>
+                </a:solidFill>
+              </a:rPr>
+              <a:t>: timeout} </a:t>
+            </a:r>
+          </a:p>
+          <a:p>
+            <a:pPr lvl="0"/>
+            <a:r>
+              <a:rPr lang="pt-BR" dirty="0">
+                <a:solidFill>
+                  <a:schemeClr val="bg1"/>
+                </a:solidFill>
+              </a:rPr>
+              <a:t>{</a:t>
+            </a:r>
+            <a:r>
+              <a:rPr lang="pt-BR" dirty="0" err="1">
+                <a:solidFill>
+                  <a:schemeClr val="bg1"/>
+                </a:solidFill>
+              </a:rPr>
+              <a:t>type</a:t>
+            </a:r>
+            <a:r>
+              <a:rPr lang="pt-BR" dirty="0">
+                <a:solidFill>
+                  <a:schemeClr val="bg1"/>
+                </a:solidFill>
+              </a:rPr>
+              <a:t>: </a:t>
+            </a:r>
+            <a:r>
+              <a:rPr lang="pt-BR" dirty="0" err="1">
+                <a:solidFill>
+                  <a:schemeClr val="bg1"/>
+                </a:solidFill>
+              </a:rPr>
+              <a:t>blackVictory</a:t>
+            </a:r>
+            <a:r>
+              <a:rPr lang="pt-BR" dirty="0">
+                <a:solidFill>
+                  <a:schemeClr val="bg1"/>
+                </a:solidFill>
+              </a:rPr>
+              <a:t>, </a:t>
+            </a:r>
+            <a:r>
+              <a:rPr lang="pt-BR" dirty="0" err="1">
+                <a:solidFill>
+                  <a:schemeClr val="bg1"/>
+                </a:solidFill>
+              </a:rPr>
+              <a:t>reason</a:t>
+            </a:r>
+            <a:r>
+              <a:rPr lang="pt-BR" dirty="0">
+                <a:solidFill>
+                  <a:schemeClr val="bg1"/>
+                </a:solidFill>
+              </a:rPr>
+              <a:t>: </a:t>
+            </a:r>
+            <a:r>
+              <a:rPr lang="pt-BR" dirty="0" err="1">
+                <a:solidFill>
+                  <a:schemeClr val="bg1"/>
+                </a:solidFill>
+              </a:rPr>
+              <a:t>checkmate</a:t>
+            </a:r>
+            <a:r>
+              <a:rPr lang="pt-BR" dirty="0">
+                <a:solidFill>
+                  <a:schemeClr val="bg1"/>
+                </a:solidFill>
+              </a:rPr>
+              <a:t>} </a:t>
+            </a:r>
+          </a:p>
+          <a:p>
+            <a:pPr lvl="0"/>
+            <a:r>
+              <a:rPr lang="pt-BR" dirty="0">
+                <a:solidFill>
+                  <a:schemeClr val="bg1"/>
+                </a:solidFill>
+              </a:rPr>
+              <a:t>{</a:t>
+            </a:r>
+            <a:r>
+              <a:rPr lang="pt-BR" dirty="0" err="1">
+                <a:solidFill>
+                  <a:schemeClr val="bg1"/>
+                </a:solidFill>
+              </a:rPr>
+              <a:t>type</a:t>
+            </a:r>
+            <a:r>
+              <a:rPr lang="pt-BR" dirty="0">
+                <a:solidFill>
+                  <a:schemeClr val="bg1"/>
+                </a:solidFill>
+              </a:rPr>
+              <a:t>: </a:t>
+            </a:r>
+            <a:r>
+              <a:rPr lang="pt-BR" dirty="0" err="1">
+                <a:solidFill>
+                  <a:schemeClr val="bg1"/>
+                </a:solidFill>
+              </a:rPr>
+              <a:t>canceled</a:t>
+            </a:r>
+            <a:r>
+              <a:rPr lang="pt-BR" dirty="0">
+                <a:solidFill>
+                  <a:schemeClr val="bg1"/>
+                </a:solidFill>
+              </a:rPr>
+              <a:t>, </a:t>
+            </a:r>
+            <a:r>
+              <a:rPr lang="pt-BR" dirty="0" err="1">
+                <a:solidFill>
+                  <a:schemeClr val="bg1"/>
+                </a:solidFill>
+              </a:rPr>
+              <a:t>reason</a:t>
+            </a:r>
+            <a:r>
+              <a:rPr lang="pt-BR" dirty="0">
+                <a:solidFill>
+                  <a:schemeClr val="bg1"/>
+                </a:solidFill>
+              </a:rPr>
+              <a:t>: </a:t>
+            </a:r>
+            <a:r>
+              <a:rPr lang="pt-BR" dirty="0" err="1">
+                <a:solidFill>
+                  <a:schemeClr val="bg1"/>
+                </a:solidFill>
+              </a:rPr>
+              <a:t>firstMvTimeout</a:t>
+            </a:r>
+            <a:r>
+              <a:rPr lang="pt-BR" dirty="0">
+                <a:solidFill>
+                  <a:schemeClr val="bg1"/>
+                </a:solidFill>
+              </a:rPr>
+              <a:t>} </a:t>
+            </a:r>
+          </a:p>
+          <a:p>
+            <a:pPr lvl="0"/>
+            <a:r>
+              <a:rPr lang="pt-BR" dirty="0">
+                <a:solidFill>
+                  <a:schemeClr val="bg1"/>
+                </a:solidFill>
+              </a:rPr>
+              <a:t>{</a:t>
+            </a:r>
+            <a:r>
+              <a:rPr lang="pt-BR" dirty="0" err="1">
+                <a:solidFill>
+                  <a:schemeClr val="bg1"/>
+                </a:solidFill>
+              </a:rPr>
+              <a:t>type</a:t>
+            </a:r>
+            <a:r>
+              <a:rPr lang="pt-BR" dirty="0">
+                <a:solidFill>
+                  <a:schemeClr val="bg1"/>
+                </a:solidFill>
+              </a:rPr>
+              <a:t>: </a:t>
+            </a:r>
+            <a:r>
+              <a:rPr lang="pt-BR" dirty="0" err="1">
+                <a:solidFill>
+                  <a:schemeClr val="bg1"/>
+                </a:solidFill>
+              </a:rPr>
+              <a:t>null</a:t>
+            </a:r>
+            <a:r>
+              <a:rPr lang="pt-BR" dirty="0">
+                <a:solidFill>
+                  <a:schemeClr val="bg1"/>
+                </a:solidFill>
+              </a:rPr>
+              <a:t>, </a:t>
+            </a:r>
+            <a:r>
+              <a:rPr lang="pt-BR" dirty="0" err="1">
+                <a:solidFill>
+                  <a:schemeClr val="bg1"/>
+                </a:solidFill>
+              </a:rPr>
+              <a:t>reason</a:t>
+            </a:r>
+            <a:r>
+              <a:rPr lang="pt-BR" dirty="0">
+                <a:solidFill>
+                  <a:schemeClr val="bg1"/>
+                </a:solidFill>
+              </a:rPr>
+              <a:t>: </a:t>
+            </a:r>
+            <a:r>
+              <a:rPr lang="pt-BR" dirty="0" err="1">
+                <a:solidFill>
+                  <a:schemeClr val="bg1"/>
+                </a:solidFill>
+              </a:rPr>
+              <a:t>ocurring</a:t>
+            </a:r>
+            <a:r>
+              <a:rPr lang="pt-BR" dirty="0">
+                <a:solidFill>
+                  <a:schemeClr val="bg1"/>
+                </a:solidFill>
+              </a:rPr>
+              <a:t>} </a:t>
+            </a:r>
+          </a:p>
+          <a:p>
+            <a:pPr lvl="0"/>
+            <a:r>
+              <a:rPr lang="pt-BR" dirty="0">
+                <a:solidFill>
+                  <a:schemeClr val="bg1"/>
+                </a:solidFill>
+              </a:rPr>
+              <a:t>{</a:t>
+            </a:r>
+            <a:r>
+              <a:rPr lang="pt-BR" dirty="0" err="1">
+                <a:solidFill>
+                  <a:schemeClr val="bg1"/>
+                </a:solidFill>
+              </a:rPr>
+              <a:t>type</a:t>
+            </a:r>
+            <a:r>
+              <a:rPr lang="pt-BR" dirty="0">
+                <a:solidFill>
+                  <a:schemeClr val="bg1"/>
+                </a:solidFill>
+              </a:rPr>
+              <a:t>: </a:t>
+            </a:r>
+            <a:r>
+              <a:rPr lang="pt-BR" dirty="0" err="1">
+                <a:solidFill>
+                  <a:schemeClr val="bg1"/>
+                </a:solidFill>
+              </a:rPr>
+              <a:t>null</a:t>
+            </a:r>
+            <a:r>
+              <a:rPr lang="pt-BR" dirty="0">
+                <a:solidFill>
+                  <a:schemeClr val="bg1"/>
+                </a:solidFill>
+              </a:rPr>
+              <a:t>, </a:t>
+            </a:r>
+            <a:r>
+              <a:rPr lang="pt-BR" dirty="0" err="1">
+                <a:solidFill>
+                  <a:schemeClr val="bg1"/>
+                </a:solidFill>
+              </a:rPr>
+              <a:t>reason</a:t>
+            </a:r>
+            <a:r>
+              <a:rPr lang="pt-BR" dirty="0">
+                <a:solidFill>
+                  <a:schemeClr val="bg1"/>
+                </a:solidFill>
+              </a:rPr>
+              <a:t>: </a:t>
+            </a:r>
+            <a:r>
+              <a:rPr lang="pt-BR" dirty="0" err="1">
+                <a:solidFill>
+                  <a:schemeClr val="bg1"/>
+                </a:solidFill>
+              </a:rPr>
+              <a:t>analysis</a:t>
+            </a:r>
+            <a:r>
+              <a:rPr lang="pt-BR" dirty="0">
+                <a:solidFill>
+                  <a:schemeClr val="bg1"/>
+                </a:solidFill>
+              </a:rPr>
+              <a:t>}</a:t>
+            </a:r>
+          </a:p>
+          <a:p>
+            <a:pPr lvl="0"/>
             <a:endParaRPr lang="pt-BR" dirty="0">
               <a:solidFill>
                 <a:schemeClr val="bg1"/>
               </a:solidFill>
             </a:endParaRPr>
           </a:p>
-          <a:p>
-            <a:pPr lvl="1"/>
-            <a:r>
-              <a:rPr lang="pt-BR" dirty="0" err="1">
-                <a:solidFill>
-                  <a:schemeClr val="bg1"/>
-                </a:solidFill>
-              </a:rPr>
-              <a:t>setGameFromPGN</a:t>
-            </a:r>
-            <a:endParaRPr lang="pt-BR" dirty="0">
-              <a:solidFill>
-                <a:schemeClr val="bg1"/>
-              </a:solidFill>
-            </a:endParaRPr>
-          </a:p>
-        </p:txBody>
-      </p:sp>
-      <p:sp>
-        <p:nvSpPr>
-          <p:cNvPr id="3" name="CaixaDeTexto 2">
-            <a:extLst>
-              <a:ext uri="{FF2B5EF4-FFF2-40B4-BE49-F238E27FC236}">
-                <a16:creationId xmlns:a16="http://schemas.microsoft.com/office/drawing/2014/main" id="{32EEA75B-1F7B-1843-99B3-1ABB941D1A43}"/>
-              </a:ext>
-            </a:extLst>
-          </p:cNvPr>
-          <p:cNvSpPr txBox="1"/>
-          <p:nvPr/>
-        </p:nvSpPr>
-        <p:spPr>
-          <a:xfrm>
-            <a:off x="7638393" y="1685307"/>
-            <a:ext cx="2797377" cy="1169551"/>
-          </a:xfrm>
-          <a:prstGeom prst="rect">
-            <a:avLst/>
-          </a:prstGeom>
-          <a:noFill/>
-        </p:spPr>
-        <p:txBody>
-          <a:bodyPr wrap="square" rtlCol="0">
-            <a:spAutoFit/>
-          </a:bodyPr>
-          <a:lstStyle/>
-          <a:p>
-            <a:r>
-              <a:rPr lang="pt-BR" sz="1400" dirty="0" err="1">
-                <a:solidFill>
-                  <a:schemeClr val="bg1"/>
-                </a:solidFill>
-              </a:rPr>
-              <a:t>virtualBoard</a:t>
-            </a:r>
-            <a:r>
-              <a:rPr lang="pt-BR" sz="1400" dirty="0">
-                <a:solidFill>
-                  <a:schemeClr val="bg1"/>
-                </a:solidFill>
-              </a:rPr>
-              <a:t> &gt; (melhor ser privado,  pois não quero que método como </a:t>
-            </a:r>
-            <a:r>
-              <a:rPr lang="pt-BR" sz="1400" dirty="0" err="1">
-                <a:solidFill>
-                  <a:schemeClr val="bg1"/>
-                </a:solidFill>
-              </a:rPr>
-              <a:t>removePiece</a:t>
-            </a:r>
-            <a:r>
-              <a:rPr lang="pt-BR" sz="1400" dirty="0">
-                <a:solidFill>
-                  <a:schemeClr val="bg1"/>
-                </a:solidFill>
-              </a:rPr>
-              <a:t> sejam acessados de fora)</a:t>
-            </a:r>
-          </a:p>
-          <a:p>
-            <a:endParaRPr lang="pt-BR" sz="1400" dirty="0"/>
-          </a:p>
         </p:txBody>
       </p:sp>
     </p:spTree>
     <p:extLst>
       <p:ext uri="{BB962C8B-B14F-4D97-AF65-F5344CB8AC3E}">
-        <p14:creationId xmlns:p14="http://schemas.microsoft.com/office/powerpoint/2010/main" val="1961216710"/>
+        <p14:creationId xmlns:p14="http://schemas.microsoft.com/office/powerpoint/2010/main" val="3713205309"/>
       </p:ext>
     </p:extLst>
   </p:cSld>
@@ -15275,7 +16331,319 @@
 </p:sld>
 </file>
 
-<file path=ppt/slides/slide11.xml><?xml version="1.0" encoding="utf-8"?>
+<file path=ppt/slides/slide12.xml><?xml version="1.0" encoding="utf-8"?>
+<p:sld xmlns:a="http://schemas.openxmlformats.org/drawingml/2006/main" xmlns:r="http://schemas.openxmlformats.org/officeDocument/2006/relationships" xmlns:p="http://schemas.openxmlformats.org/presentationml/2006/main">
+  <p:cSld>
+    <p:spTree>
+      <p:nvGrpSpPr>
+        <p:cNvPr id="1" name="">
+          <a:extLst>
+            <a:ext uri="{FF2B5EF4-FFF2-40B4-BE49-F238E27FC236}">
+              <a16:creationId xmlns:a16="http://schemas.microsoft.com/office/drawing/2014/main" id="{70EC4C13-AA62-B000-F740-489E2CE2FC66}"/>
+            </a:ext>
+          </a:extLst>
+        </p:cNvPr>
+        <p:cNvGrpSpPr/>
+        <p:nvPr/>
+      </p:nvGrpSpPr>
+      <p:grpSpPr>
+        <a:xfrm>
+          <a:off x="0" y="0"/>
+          <a:ext cx="0" cy="0"/>
+          <a:chOff x="0" y="0"/>
+          <a:chExt cx="0" cy="0"/>
+        </a:xfrm>
+      </p:grpSpPr>
+      <p:sp>
+        <p:nvSpPr>
+          <p:cNvPr id="2" name="Título 1">
+            <a:extLst>
+              <a:ext uri="{FF2B5EF4-FFF2-40B4-BE49-F238E27FC236}">
+                <a16:creationId xmlns:a16="http://schemas.microsoft.com/office/drawing/2014/main" id="{A91F34C3-F40A-B1DD-9F1C-32ADF2295C6E}"/>
+              </a:ext>
+            </a:extLst>
+          </p:cNvPr>
+          <p:cNvSpPr>
+            <a:spLocks noGrp="1"/>
+          </p:cNvSpPr>
+          <p:nvPr>
+            <p:ph type="ctrTitle"/>
+          </p:nvPr>
+        </p:nvSpPr>
+        <p:spPr>
+          <a:xfrm>
+            <a:off x="0" y="0"/>
+            <a:ext cx="12194286" cy="883920"/>
+          </a:xfrm>
+          <a:solidFill>
+            <a:schemeClr val="bg1">
+              <a:lumMod val="85000"/>
+              <a:lumOff val="15000"/>
+            </a:schemeClr>
+          </a:solidFill>
+        </p:spPr>
+        <p:txBody>
+          <a:bodyPr>
+            <a:normAutofit fontScale="90000"/>
+          </a:bodyPr>
+          <a:lstStyle/>
+          <a:p>
+            <a:pPr algn="l"/>
+            <a:r>
+              <a:rPr lang="pt-BR" dirty="0" err="1">
+                <a:solidFill>
+                  <a:schemeClr val="tx1"/>
+                </a:solidFill>
+              </a:rPr>
+              <a:t>Property</a:t>
+            </a:r>
+            <a:r>
+              <a:rPr lang="pt-BR" dirty="0">
+                <a:solidFill>
+                  <a:schemeClr val="tx1"/>
+                </a:solidFill>
+              </a:rPr>
+              <a:t> </a:t>
+            </a:r>
+            <a:r>
+              <a:rPr lang="pt-BR" dirty="0" err="1">
+                <a:solidFill>
+                  <a:schemeClr val="tx1"/>
+                </a:solidFill>
+              </a:rPr>
+              <a:t>timecontrol</a:t>
+            </a:r>
+            <a:endParaRPr lang="pt-BR" dirty="0">
+              <a:solidFill>
+                <a:schemeClr val="tx1"/>
+              </a:solidFill>
+            </a:endParaRPr>
+          </a:p>
+        </p:txBody>
+      </p:sp>
+      <p:sp>
+        <p:nvSpPr>
+          <p:cNvPr id="13" name="Retângulo 12">
+            <a:extLst>
+              <a:ext uri="{FF2B5EF4-FFF2-40B4-BE49-F238E27FC236}">
+                <a16:creationId xmlns:a16="http://schemas.microsoft.com/office/drawing/2014/main" id="{07F3AD6B-FB50-7CD0-AE3C-E68C09837200}"/>
+              </a:ext>
+            </a:extLst>
+          </p:cNvPr>
+          <p:cNvSpPr/>
+          <p:nvPr/>
+        </p:nvSpPr>
+        <p:spPr>
+          <a:xfrm>
+            <a:off x="553106" y="1201595"/>
+            <a:ext cx="9615654" cy="5201503"/>
+          </a:xfrm>
+          <a:prstGeom prst="rect">
+            <a:avLst/>
+          </a:prstGeom>
+          <a:solidFill>
+            <a:schemeClr val="accent1">
+              <a:lumMod val="40000"/>
+              <a:lumOff val="60000"/>
+            </a:schemeClr>
+          </a:solidFill>
+          <a:ln>
+            <a:solidFill>
+              <a:schemeClr val="bg1"/>
+            </a:solidFill>
+          </a:ln>
+        </p:spPr>
+        <p:style>
+          <a:lnRef idx="2">
+            <a:schemeClr val="accent1">
+              <a:shade val="15000"/>
+            </a:schemeClr>
+          </a:lnRef>
+          <a:fillRef idx="1">
+            <a:schemeClr val="accent1"/>
+          </a:fillRef>
+          <a:effectRef idx="0">
+            <a:schemeClr val="accent1"/>
+          </a:effectRef>
+          <a:fontRef idx="minor">
+            <a:schemeClr val="lt1"/>
+          </a:fontRef>
+        </p:style>
+        <p:txBody>
+          <a:bodyPr numCol="2" rtlCol="0" anchor="ctr"/>
+          <a:lstStyle/>
+          <a:p>
+            <a:pPr lvl="0"/>
+            <a:r>
+              <a:rPr lang="pt-BR" dirty="0">
+                <a:solidFill>
+                  <a:schemeClr val="bg1"/>
+                </a:solidFill>
+              </a:rPr>
+              <a:t> </a:t>
+            </a:r>
+            <a:endParaRPr lang="en-US" dirty="0">
+              <a:solidFill>
+                <a:schemeClr val="bg1"/>
+              </a:solidFill>
+            </a:endParaRPr>
+          </a:p>
+          <a:p>
+            <a:pPr lvl="0"/>
+            <a:r>
+              <a:rPr lang="en-US" dirty="0">
+                <a:solidFill>
+                  <a:schemeClr val="bg1"/>
+                </a:solidFill>
+              </a:rPr>
+              <a:t>{</a:t>
+            </a:r>
+          </a:p>
+          <a:p>
+            <a:pPr lvl="0"/>
+            <a:r>
+              <a:rPr lang="en-US" dirty="0" err="1">
+                <a:solidFill>
+                  <a:schemeClr val="bg1"/>
+                </a:solidFill>
+              </a:rPr>
+              <a:t>eachPlayerAmount</a:t>
+            </a:r>
+            <a:r>
+              <a:rPr lang="en-US" dirty="0">
+                <a:solidFill>
+                  <a:schemeClr val="bg1"/>
+                </a:solidFill>
+              </a:rPr>
+              <a:t>: float (in milliseconds?), increment: (float),</a:t>
+            </a:r>
+          </a:p>
+          <a:p>
+            <a:pPr lvl="0"/>
+            <a:r>
+              <a:rPr lang="en-US" dirty="0">
+                <a:solidFill>
+                  <a:schemeClr val="bg1"/>
+                </a:solidFill>
+              </a:rPr>
+              <a:t>delay: (float)}</a:t>
+            </a:r>
+          </a:p>
+          <a:p>
+            <a:pPr lvl="0"/>
+            <a:endParaRPr lang="en-US" u="sng" dirty="0">
+              <a:solidFill>
+                <a:schemeClr val="bg1"/>
+              </a:solidFill>
+            </a:endParaRPr>
+          </a:p>
+          <a:p>
+            <a:pPr lvl="0"/>
+            <a:r>
+              <a:rPr lang="en-US" dirty="0">
+                <a:solidFill>
+                  <a:schemeClr val="bg1"/>
+                </a:solidFill>
+              </a:rPr>
+              <a:t>if classical with </a:t>
+            </a:r>
+            <a:r>
+              <a:rPr lang="en-US" dirty="0" err="1">
+                <a:solidFill>
+                  <a:schemeClr val="bg1"/>
+                </a:solidFill>
+              </a:rPr>
+              <a:t>timeControl</a:t>
+            </a:r>
+            <a:r>
+              <a:rPr lang="en-US" dirty="0">
+                <a:solidFill>
+                  <a:schemeClr val="bg1"/>
+                </a:solidFill>
+              </a:rPr>
+              <a:t> variation in</a:t>
+            </a:r>
+          </a:p>
+          <a:p>
+            <a:pPr lvl="0"/>
+            <a:r>
+              <a:rPr lang="en-US" dirty="0">
+                <a:solidFill>
+                  <a:schemeClr val="bg1"/>
+                </a:solidFill>
+              </a:rPr>
+              <a:t>40 moves, we can put 2 or more inner objects and a new property (</a:t>
+            </a:r>
+            <a:r>
+              <a:rPr lang="en-US" dirty="0" err="1">
+                <a:solidFill>
+                  <a:schemeClr val="bg1"/>
+                </a:solidFill>
+              </a:rPr>
+              <a:t>limitMoveNumber</a:t>
+            </a:r>
+            <a:r>
+              <a:rPr lang="en-US" dirty="0">
+                <a:solidFill>
+                  <a:schemeClr val="bg1"/>
+                </a:solidFill>
+              </a:rPr>
+              <a:t>)</a:t>
+            </a:r>
+            <a:endParaRPr lang="pt-BR" dirty="0">
+              <a:solidFill>
+                <a:schemeClr val="bg1"/>
+              </a:solidFill>
+            </a:endParaRPr>
+          </a:p>
+        </p:txBody>
+      </p:sp>
+      <p:sp>
+        <p:nvSpPr>
+          <p:cNvPr id="3" name="CaixaDeTexto 2">
+            <a:extLst>
+              <a:ext uri="{FF2B5EF4-FFF2-40B4-BE49-F238E27FC236}">
+                <a16:creationId xmlns:a16="http://schemas.microsoft.com/office/drawing/2014/main" id="{47E19362-DD9F-D448-CB91-1B352516674E}"/>
+              </a:ext>
+            </a:extLst>
+          </p:cNvPr>
+          <p:cNvSpPr txBox="1"/>
+          <p:nvPr/>
+        </p:nvSpPr>
+        <p:spPr>
+          <a:xfrm>
+            <a:off x="3247697" y="2727434"/>
+            <a:ext cx="184731" cy="369332"/>
+          </a:xfrm>
+          <a:prstGeom prst="rect">
+            <a:avLst/>
+          </a:prstGeom>
+          <a:noFill/>
+        </p:spPr>
+        <p:txBody>
+          <a:bodyPr wrap="none" rtlCol="0">
+            <a:spAutoFit/>
+          </a:bodyPr>
+          <a:lstStyle/>
+          <a:p>
+            <a:endParaRPr lang="pt-BR" dirty="0"/>
+          </a:p>
+        </p:txBody>
+      </p:sp>
+    </p:spTree>
+    <p:extLst>
+      <p:ext uri="{BB962C8B-B14F-4D97-AF65-F5344CB8AC3E}">
+        <p14:creationId xmlns:p14="http://schemas.microsoft.com/office/powerpoint/2010/main" val="270873233"/>
+      </p:ext>
+    </p:extLst>
+  </p:cSld>
+  <p:clrMapOvr>
+    <a:masterClrMapping/>
+  </p:clrMapOvr>
+</p:sld>
+</file>
+
+<file path=ppt/slides/slide13.xml><?xml version="1.0" encoding="utf-8"?>
 <p:sld xmlns:a="http://schemas.openxmlformats.org/drawingml/2006/main" xmlns:r="http://schemas.openxmlformats.org/officeDocument/2006/relationships" xmlns:p="http://schemas.openxmlformats.org/presentationml/2006/main">
   <p:cSld>
     <p:spTree>
@@ -15372,7 +16740,7 @@
 </p:sld>
 </file>
 
-<file path=ppt/slides/slide12.xml><?xml version="1.0" encoding="utf-8"?>
+<file path=ppt/slides/slide14.xml><?xml version="1.0" encoding="utf-8"?>
 <p:sld xmlns:a="http://schemas.openxmlformats.org/drawingml/2006/main" xmlns:r="http://schemas.openxmlformats.org/officeDocument/2006/relationships" xmlns:p="http://schemas.openxmlformats.org/presentationml/2006/main">
   <p:cSld>
     <p:spTree>
@@ -15825,7 +17193,7 @@
 </p:sld>
 </file>
 
-<file path=ppt/slides/slide13.xml><?xml version="1.0" encoding="utf-8"?>
+<file path=ppt/slides/slide15.xml><?xml version="1.0" encoding="utf-8"?>
 <p:sld xmlns:a="http://schemas.openxmlformats.org/drawingml/2006/main" xmlns:r="http://schemas.openxmlformats.org/officeDocument/2006/relationships" xmlns:p="http://schemas.openxmlformats.org/presentationml/2006/main">
   <p:cSld>
     <p:spTree>
@@ -15972,7 +17340,7 @@
 </p:sld>
 </file>
 
-<file path=ppt/slides/slide14.xml><?xml version="1.0" encoding="utf-8"?>
+<file path=ppt/slides/slide16.xml><?xml version="1.0" encoding="utf-8"?>
 <p:sld xmlns:a="http://schemas.openxmlformats.org/drawingml/2006/main" xmlns:r="http://schemas.openxmlformats.org/officeDocument/2006/relationships" xmlns:p="http://schemas.openxmlformats.org/presentationml/2006/main">
   <p:cSld>
     <p:spTree>
